--- a/paper modification/papers/Trapping analysis of a magnetic electron.pptx
+++ b/paper modification/papers/Trapping analysis of a magnetic electron.pptx
@@ -5,7 +5,7 @@
     <p:sldMasterId id="2147483648" r:id="rId1"/>
   </p:sldMasterIdLst>
   <p:notesMasterIdLst>
-    <p:notesMasterId r:id="rId19"/>
+    <p:notesMasterId r:id="rId20"/>
   </p:notesMasterIdLst>
   <p:sldIdLst>
     <p:sldId id="256" r:id="rId2"/>
@@ -25,6 +25,7 @@
     <p:sldId id="260" r:id="rId16"/>
     <p:sldId id="273" r:id="rId17"/>
     <p:sldId id="274" r:id="rId18"/>
+    <p:sldId id="275" r:id="rId19"/>
   </p:sldIdLst>
   <p:sldSz cx="12192000" cy="6858000"/>
   <p:notesSz cx="6858000" cy="9144000"/>
@@ -213,7 +214,7 @@
           <a:p>
             <a:fld id="{1BF66CA3-484B-459C-B714-8284D0EE9C08}" type="datetimeFigureOut">
               <a:rPr lang="en-US" smtClean="0"/>
-              <a:t>2/1/2026</a:t>
+              <a:t>3/8/2026</a:t>
             </a:fld>
             <a:endParaRPr lang="en-US"/>
           </a:p>
@@ -838,7 +839,7 @@
           <a:p>
             <a:fld id="{22644C63-7FDE-4D31-B4BB-7754D5A27718}" type="datetimeFigureOut">
               <a:rPr lang="en-US" smtClean="0"/>
-              <a:t>2/1/2026</a:t>
+              <a:t>3/8/2026</a:t>
             </a:fld>
             <a:endParaRPr lang="en-US"/>
           </a:p>
@@ -1036,7 +1037,7 @@
           <a:p>
             <a:fld id="{22644C63-7FDE-4D31-B4BB-7754D5A27718}" type="datetimeFigureOut">
               <a:rPr lang="en-US" smtClean="0"/>
-              <a:t>2/1/2026</a:t>
+              <a:t>3/8/2026</a:t>
             </a:fld>
             <a:endParaRPr lang="en-US"/>
           </a:p>
@@ -1244,7 +1245,7 @@
           <a:p>
             <a:fld id="{22644C63-7FDE-4D31-B4BB-7754D5A27718}" type="datetimeFigureOut">
               <a:rPr lang="en-US" smtClean="0"/>
-              <a:t>2/1/2026</a:t>
+              <a:t>3/8/2026</a:t>
             </a:fld>
             <a:endParaRPr lang="en-US"/>
           </a:p>
@@ -1442,7 +1443,7 @@
           <a:p>
             <a:fld id="{22644C63-7FDE-4D31-B4BB-7754D5A27718}" type="datetimeFigureOut">
               <a:rPr lang="en-US" smtClean="0"/>
-              <a:t>2/1/2026</a:t>
+              <a:t>3/8/2026</a:t>
             </a:fld>
             <a:endParaRPr lang="en-US"/>
           </a:p>
@@ -1717,7 +1718,7 @@
           <a:p>
             <a:fld id="{22644C63-7FDE-4D31-B4BB-7754D5A27718}" type="datetimeFigureOut">
               <a:rPr lang="en-US" smtClean="0"/>
-              <a:t>2/1/2026</a:t>
+              <a:t>3/8/2026</a:t>
             </a:fld>
             <a:endParaRPr lang="en-US"/>
           </a:p>
@@ -1982,7 +1983,7 @@
           <a:p>
             <a:fld id="{22644C63-7FDE-4D31-B4BB-7754D5A27718}" type="datetimeFigureOut">
               <a:rPr lang="en-US" smtClean="0"/>
-              <a:t>2/1/2026</a:t>
+              <a:t>3/8/2026</a:t>
             </a:fld>
             <a:endParaRPr lang="en-US"/>
           </a:p>
@@ -2394,7 +2395,7 @@
           <a:p>
             <a:fld id="{22644C63-7FDE-4D31-B4BB-7754D5A27718}" type="datetimeFigureOut">
               <a:rPr lang="en-US" smtClean="0"/>
-              <a:t>2/1/2026</a:t>
+              <a:t>3/8/2026</a:t>
             </a:fld>
             <a:endParaRPr lang="en-US"/>
           </a:p>
@@ -2535,7 +2536,7 @@
           <a:p>
             <a:fld id="{22644C63-7FDE-4D31-B4BB-7754D5A27718}" type="datetimeFigureOut">
               <a:rPr lang="en-US" smtClean="0"/>
-              <a:t>2/1/2026</a:t>
+              <a:t>3/8/2026</a:t>
             </a:fld>
             <a:endParaRPr lang="en-US"/>
           </a:p>
@@ -2648,7 +2649,7 @@
           <a:p>
             <a:fld id="{22644C63-7FDE-4D31-B4BB-7754D5A27718}" type="datetimeFigureOut">
               <a:rPr lang="en-US" smtClean="0"/>
-              <a:t>2/1/2026</a:t>
+              <a:t>3/8/2026</a:t>
             </a:fld>
             <a:endParaRPr lang="en-US"/>
           </a:p>
@@ -2959,7 +2960,7 @@
           <a:p>
             <a:fld id="{22644C63-7FDE-4D31-B4BB-7754D5A27718}" type="datetimeFigureOut">
               <a:rPr lang="en-US" smtClean="0"/>
-              <a:t>2/1/2026</a:t>
+              <a:t>3/8/2026</a:t>
             </a:fld>
             <a:endParaRPr lang="en-US"/>
           </a:p>
@@ -3247,7 +3248,7 @@
           <a:p>
             <a:fld id="{22644C63-7FDE-4D31-B4BB-7754D5A27718}" type="datetimeFigureOut">
               <a:rPr lang="en-US" smtClean="0"/>
-              <a:t>2/1/2026</a:t>
+              <a:t>3/8/2026</a:t>
             </a:fld>
             <a:endParaRPr lang="en-US"/>
           </a:p>
@@ -3488,7 +3489,7 @@
           <a:p>
             <a:fld id="{22644C63-7FDE-4D31-B4BB-7754D5A27718}" type="datetimeFigureOut">
               <a:rPr lang="en-US" smtClean="0"/>
-              <a:t>2/1/2026</a:t>
+              <a:t>3/8/2026</a:t>
             </a:fld>
             <a:endParaRPr lang="en-US"/>
           </a:p>
@@ -13120,6 +13121,217 @@
     <p:extLst>
       <p:ext uri="{BB962C8B-B14F-4D97-AF65-F5344CB8AC3E}">
         <p14:creationId xmlns:p14="http://schemas.microsoft.com/office/powerpoint/2010/main" val="446784114"/>
+      </p:ext>
+    </p:extLst>
+  </p:cSld>
+  <p:clrMapOvr>
+    <a:masterClrMapping/>
+  </p:clrMapOvr>
+</p:sld>
+</file>
+
+<file path=ppt/slides/slide18.xml><?xml version="1.0" encoding="utf-8"?>
+<p:sld xmlns:a="http://schemas.openxmlformats.org/drawingml/2006/main" xmlns:r="http://schemas.openxmlformats.org/officeDocument/2006/relationships" xmlns:p="http://schemas.openxmlformats.org/presentationml/2006/main">
+  <p:cSld>
+    <p:spTree>
+      <p:nvGrpSpPr>
+        <p:cNvPr id="1" name=""/>
+        <p:cNvGrpSpPr/>
+        <p:nvPr/>
+      </p:nvGrpSpPr>
+      <p:grpSpPr>
+        <a:xfrm>
+          <a:off x="0" y="0"/>
+          <a:ext cx="0" cy="0"/>
+          <a:chOff x="0" y="0"/>
+          <a:chExt cx="0" cy="0"/>
+        </a:xfrm>
+      </p:grpSpPr>
+      <p:grpSp>
+        <p:nvGrpSpPr>
+          <p:cNvPr id="6" name="Group 5">
+            <a:extLst>
+              <a:ext uri="{FF2B5EF4-FFF2-40B4-BE49-F238E27FC236}">
+                <a16:creationId xmlns:a16="http://schemas.microsoft.com/office/drawing/2014/main" id="{A79CBAA6-FAE1-4271-B5E3-F8AA46B528E4}"/>
+              </a:ext>
+            </a:extLst>
+          </p:cNvPr>
+          <p:cNvGrpSpPr/>
+          <p:nvPr/>
+        </p:nvGrpSpPr>
+        <p:grpSpPr>
+          <a:xfrm>
+            <a:off x="2224839" y="609601"/>
+            <a:ext cx="8239628" cy="3384885"/>
+            <a:chOff x="508334" y="713874"/>
+            <a:chExt cx="8239628" cy="3384885"/>
+          </a:xfrm>
+        </p:grpSpPr>
+        <p:pic>
+          <p:nvPicPr>
+            <p:cNvPr id="2" name="Picture 1">
+              <a:extLst>
+                <a:ext uri="{FF2B5EF4-FFF2-40B4-BE49-F238E27FC236}">
+                  <a16:creationId xmlns:a16="http://schemas.microsoft.com/office/drawing/2014/main" id="{2DF1DF89-E98C-408C-85A3-05FEBE764082}"/>
+                </a:ext>
+              </a:extLst>
+            </p:cNvPr>
+            <p:cNvPicPr>
+              <a:picLocks noChangeAspect="1"/>
+            </p:cNvPicPr>
+            <p:nvPr/>
+          </p:nvPicPr>
+          <p:blipFill>
+            <a:blip r:embed="rId2"/>
+            <a:stretch>
+              <a:fillRect/>
+            </a:stretch>
+          </p:blipFill>
+          <p:spPr>
+            <a:xfrm>
+              <a:off x="508334" y="864519"/>
+              <a:ext cx="4312320" cy="3234240"/>
+            </a:xfrm>
+            <a:prstGeom prst="rect">
+              <a:avLst/>
+            </a:prstGeom>
+          </p:spPr>
+        </p:pic>
+        <p:pic>
+          <p:nvPicPr>
+            <p:cNvPr id="3" name="Picture 2">
+              <a:extLst>
+                <a:ext uri="{FF2B5EF4-FFF2-40B4-BE49-F238E27FC236}">
+                  <a16:creationId xmlns:a16="http://schemas.microsoft.com/office/drawing/2014/main" id="{88445643-742D-4695-BF1B-D7F8DA7BE403}"/>
+                </a:ext>
+              </a:extLst>
+            </p:cNvPr>
+            <p:cNvPicPr>
+              <a:picLocks noChangeAspect="1"/>
+            </p:cNvPicPr>
+            <p:nvPr/>
+          </p:nvPicPr>
+          <p:blipFill>
+            <a:blip r:embed="rId3"/>
+            <a:stretch>
+              <a:fillRect/>
+            </a:stretch>
+          </p:blipFill>
+          <p:spPr>
+            <a:xfrm>
+              <a:off x="4435642" y="864519"/>
+              <a:ext cx="4312320" cy="3234240"/>
+            </a:xfrm>
+            <a:prstGeom prst="rect">
+              <a:avLst/>
+            </a:prstGeom>
+          </p:spPr>
+        </p:pic>
+        <p:sp>
+          <p:nvSpPr>
+            <p:cNvPr id="4" name="TextBox 3">
+              <a:extLst>
+                <a:ext uri="{FF2B5EF4-FFF2-40B4-BE49-F238E27FC236}">
+                  <a16:creationId xmlns:a16="http://schemas.microsoft.com/office/drawing/2014/main" id="{469C2F4E-5B41-40C9-9E8A-4CE684A82A6A}"/>
+                </a:ext>
+              </a:extLst>
+            </p:cNvPr>
+            <p:cNvSpPr txBox="1"/>
+            <p:nvPr/>
+          </p:nvSpPr>
+          <p:spPr>
+            <a:xfrm>
+              <a:off x="1049755" y="713874"/>
+              <a:ext cx="681790" cy="369332"/>
+            </a:xfrm>
+            <a:prstGeom prst="rect">
+              <a:avLst/>
+            </a:prstGeom>
+            <a:noFill/>
+          </p:spPr>
+          <p:txBody>
+            <a:bodyPr wrap="square" rtlCol="0">
+              <a:spAutoFit/>
+            </a:bodyPr>
+            <a:lstStyle/>
+            <a:p>
+              <a:r>
+                <a:rPr lang="en-US" dirty="0"/>
+                <a:t>(a)</a:t>
+              </a:r>
+            </a:p>
+          </p:txBody>
+        </p:sp>
+        <p:sp>
+          <p:nvSpPr>
+            <p:cNvPr id="5" name="TextBox 4">
+              <a:extLst>
+                <a:ext uri="{FF2B5EF4-FFF2-40B4-BE49-F238E27FC236}">
+                  <a16:creationId xmlns:a16="http://schemas.microsoft.com/office/drawing/2014/main" id="{A6EB3EA1-7230-4068-9033-A9F9C356E33A}"/>
+                </a:ext>
+              </a:extLst>
+            </p:cNvPr>
+            <p:cNvSpPr txBox="1"/>
+            <p:nvPr/>
+          </p:nvSpPr>
+          <p:spPr>
+            <a:xfrm>
+              <a:off x="4840708" y="713874"/>
+              <a:ext cx="681790" cy="369332"/>
+            </a:xfrm>
+            <a:prstGeom prst="rect">
+              <a:avLst/>
+            </a:prstGeom>
+            <a:noFill/>
+          </p:spPr>
+          <p:txBody>
+            <a:bodyPr wrap="square" rtlCol="0">
+              <a:spAutoFit/>
+            </a:bodyPr>
+            <a:lstStyle/>
+            <a:p>
+              <a:r>
+                <a:rPr lang="en-US" dirty="0"/>
+                <a:t>(b)</a:t>
+              </a:r>
+            </a:p>
+          </p:txBody>
+        </p:sp>
+      </p:grpSp>
+      <p:pic>
+        <p:nvPicPr>
+          <p:cNvPr id="8" name="Picture 7">
+            <a:extLst>
+              <a:ext uri="{FF2B5EF4-FFF2-40B4-BE49-F238E27FC236}">
+                <a16:creationId xmlns:a16="http://schemas.microsoft.com/office/drawing/2014/main" id="{B04603E3-3358-42F4-A320-1E8CE204DF66}"/>
+              </a:ext>
+            </a:extLst>
+          </p:cNvPr>
+          <p:cNvPicPr>
+            <a:picLocks noChangeAspect="1"/>
+          </p:cNvPicPr>
+          <p:nvPr/>
+        </p:nvPicPr>
+        <p:blipFill>
+          <a:blip r:embed="rId4"/>
+          <a:stretch>
+            <a:fillRect/>
+          </a:stretch>
+        </p:blipFill>
+        <p:spPr>
+          <a:xfrm>
+            <a:off x="1084410" y="2053572"/>
+            <a:ext cx="8242506" cy="3414056"/>
+          </a:xfrm>
+          <a:prstGeom prst="rect">
+            <a:avLst/>
+          </a:prstGeom>
+        </p:spPr>
+      </p:pic>
+    </p:spTree>
+    <p:extLst>
+      <p:ext uri="{BB962C8B-B14F-4D97-AF65-F5344CB8AC3E}">
+        <p14:creationId xmlns:p14="http://schemas.microsoft.com/office/powerpoint/2010/main" val="1945883992"/>
       </p:ext>
     </p:extLst>
   </p:cSld>
